--- a/卒業制作中間発表.pptx
+++ b/卒業制作中間発表.pptx
@@ -8,9 +8,10 @@
     <p:sldId id="261" r:id="rId2"/>
     <p:sldId id="257" r:id="rId3"/>
     <p:sldId id="258" r:id="rId4"/>
-    <p:sldId id="265" r:id="rId5"/>
-    <p:sldId id="263" r:id="rId6"/>
-    <p:sldId id="264" r:id="rId7"/>
+    <p:sldId id="263" r:id="rId5"/>
+    <p:sldId id="267" r:id="rId6"/>
+    <p:sldId id="265" r:id="rId7"/>
+    <p:sldId id="264" r:id="rId8"/>
   </p:sldIdLst>
   <p:sldSz cx="12192000" cy="6858000"/>
   <p:notesSz cx="6858000" cy="9144000"/>
@@ -579,7 +580,7 @@
           <a:p>
             <a:fld id="{A5A3473F-CB22-4ECF-829A-4C90F8B7E72D}" type="datetimeFigureOut">
               <a:rPr kumimoji="1" lang="ja-JP" altLang="en-US" smtClean="0"/>
-              <a:t>2026/7/3</a:t>
+              <a:t>2026/7/6</a:t>
             </a:fld>
             <a:endParaRPr kumimoji="1" lang="ja-JP" altLang="en-US"/>
           </a:p>
@@ -813,7 +814,7 @@
           <a:p>
             <a:fld id="{A5A3473F-CB22-4ECF-829A-4C90F8B7E72D}" type="datetimeFigureOut">
               <a:rPr kumimoji="1" lang="ja-JP" altLang="en-US" smtClean="0"/>
-              <a:t>2026/7/3</a:t>
+              <a:t>2026/7/6</a:t>
             </a:fld>
             <a:endParaRPr kumimoji="1" lang="ja-JP" altLang="en-US"/>
           </a:p>
@@ -1025,7 +1026,7 @@
           <a:p>
             <a:fld id="{A5A3473F-CB22-4ECF-829A-4C90F8B7E72D}" type="datetimeFigureOut">
               <a:rPr kumimoji="1" lang="ja-JP" altLang="en-US" smtClean="0"/>
-              <a:t>2026/7/3</a:t>
+              <a:t>2026/7/6</a:t>
             </a:fld>
             <a:endParaRPr kumimoji="1" lang="ja-JP" altLang="en-US"/>
           </a:p>
@@ -1227,7 +1228,7 @@
           <a:p>
             <a:fld id="{A5A3473F-CB22-4ECF-829A-4C90F8B7E72D}" type="datetimeFigureOut">
               <a:rPr kumimoji="1" lang="ja-JP" altLang="en-US" smtClean="0"/>
-              <a:t>2026/7/3</a:t>
+              <a:t>2026/7/6</a:t>
             </a:fld>
             <a:endParaRPr kumimoji="1" lang="ja-JP" altLang="en-US"/>
           </a:p>
@@ -1798,7 +1799,7 @@
           <a:p>
             <a:fld id="{A5A3473F-CB22-4ECF-829A-4C90F8B7E72D}" type="datetimeFigureOut">
               <a:rPr kumimoji="1" lang="ja-JP" altLang="en-US" smtClean="0"/>
-              <a:t>2026/7/3</a:t>
+              <a:t>2026/7/6</a:t>
             </a:fld>
             <a:endParaRPr kumimoji="1" lang="ja-JP" altLang="en-US"/>
           </a:p>
@@ -2164,7 +2165,7 @@
           <a:p>
             <a:fld id="{A5A3473F-CB22-4ECF-829A-4C90F8B7E72D}" type="datetimeFigureOut">
               <a:rPr kumimoji="1" lang="ja-JP" altLang="en-US" smtClean="0"/>
-              <a:t>2026/7/3</a:t>
+              <a:t>2026/7/6</a:t>
             </a:fld>
             <a:endParaRPr kumimoji="1" lang="ja-JP" altLang="en-US"/>
           </a:p>
@@ -2665,7 +2666,7 @@
           <a:p>
             <a:fld id="{A5A3473F-CB22-4ECF-829A-4C90F8B7E72D}" type="datetimeFigureOut">
               <a:rPr kumimoji="1" lang="ja-JP" altLang="en-US" smtClean="0"/>
-              <a:t>2026/7/3</a:t>
+              <a:t>2026/7/6</a:t>
             </a:fld>
             <a:endParaRPr kumimoji="1" lang="ja-JP" altLang="en-US"/>
           </a:p>
@@ -2783,7 +2784,7 @@
           <a:p>
             <a:fld id="{A5A3473F-CB22-4ECF-829A-4C90F8B7E72D}" type="datetimeFigureOut">
               <a:rPr kumimoji="1" lang="ja-JP" altLang="en-US" smtClean="0"/>
-              <a:t>2026/7/3</a:t>
+              <a:t>2026/7/6</a:t>
             </a:fld>
             <a:endParaRPr kumimoji="1" lang="ja-JP" altLang="en-US"/>
           </a:p>
@@ -2878,7 +2879,7 @@
           <a:p>
             <a:fld id="{A5A3473F-CB22-4ECF-829A-4C90F8B7E72D}" type="datetimeFigureOut">
               <a:rPr kumimoji="1" lang="ja-JP" altLang="en-US" smtClean="0"/>
-              <a:t>2026/7/3</a:t>
+              <a:t>2026/7/6</a:t>
             </a:fld>
             <a:endParaRPr kumimoji="1" lang="ja-JP" altLang="en-US"/>
           </a:p>
@@ -3292,7 +3293,7 @@
           <a:p>
             <a:fld id="{A5A3473F-CB22-4ECF-829A-4C90F8B7E72D}" type="datetimeFigureOut">
               <a:rPr kumimoji="1" lang="ja-JP" altLang="en-US" smtClean="0"/>
-              <a:t>2026/7/3</a:t>
+              <a:t>2026/7/6</a:t>
             </a:fld>
             <a:endParaRPr kumimoji="1" lang="ja-JP" altLang="en-US"/>
           </a:p>
@@ -3686,7 +3687,7 @@
           <a:p>
             <a:fld id="{A5A3473F-CB22-4ECF-829A-4C90F8B7E72D}" type="datetimeFigureOut">
               <a:rPr kumimoji="1" lang="ja-JP" altLang="en-US" smtClean="0"/>
-              <a:t>2026/7/3</a:t>
+              <a:t>2026/7/6</a:t>
             </a:fld>
             <a:endParaRPr kumimoji="1" lang="ja-JP" altLang="en-US"/>
           </a:p>
@@ -4031,7 +4032,7 @@
           <a:p>
             <a:fld id="{A5A3473F-CB22-4ECF-829A-4C90F8B7E72D}" type="datetimeFigureOut">
               <a:rPr kumimoji="1" lang="ja-JP" altLang="en-US" smtClean="0"/>
-              <a:t>2026/7/3</a:t>
+              <a:t>2026/7/6</a:t>
             </a:fld>
             <a:endParaRPr kumimoji="1" lang="ja-JP" altLang="en-US"/>
           </a:p>
@@ -4805,17 +4806,158 @@
           <a:chExt cx="0" cy="0"/>
         </a:xfrm>
       </p:grpSpPr>
+      <p:sp>
+        <p:nvSpPr>
+          <p:cNvPr id="3" name="正方形/長方形 2">
+            <a:extLst>
+              <a:ext uri="{FF2B5EF4-FFF2-40B4-BE49-F238E27FC236}">
+                <a16:creationId xmlns:a16="http://schemas.microsoft.com/office/drawing/2014/main" id="{A7FC1735-7661-B54E-C606-B8B5CE37FBA9}"/>
+              </a:ext>
+            </a:extLst>
+          </p:cNvPr>
+          <p:cNvSpPr/>
+          <p:nvPr/>
+        </p:nvSpPr>
+        <p:spPr>
+          <a:xfrm>
+            <a:off x="457282" y="436879"/>
+            <a:ext cx="11277435" cy="5984242"/>
+          </a:xfrm>
+          <a:prstGeom prst="rect">
+            <a:avLst/>
+          </a:prstGeom>
+          <a:ln>
+            <a:solidFill>
+              <a:schemeClr val="bg1"/>
+            </a:solidFill>
+          </a:ln>
+        </p:spPr>
+        <p:style>
+          <a:lnRef idx="2">
+            <a:schemeClr val="accent1">
+              <a:shade val="15000"/>
+            </a:schemeClr>
+          </a:lnRef>
+          <a:fillRef idx="1001">
+            <a:schemeClr val="lt1"/>
+          </a:fillRef>
+          <a:effectRef idx="0">
+            <a:schemeClr val="accent1"/>
+          </a:effectRef>
+          <a:fontRef idx="minor">
+            <a:schemeClr val="lt1"/>
+          </a:fontRef>
+        </p:style>
+        <p:txBody>
+          <a:bodyPr rtlCol="0" anchor="ctr"/>
+          <a:lstStyle/>
+          <a:p>
+            <a:pPr algn="ctr"/>
+            <a:endParaRPr kumimoji="1" lang="ja-JP" altLang="en-US" dirty="0"/>
+          </a:p>
+        </p:txBody>
+      </p:sp>
+      <p:sp>
+        <p:nvSpPr>
+          <p:cNvPr id="2" name="テキスト ボックス 1">
+            <a:extLst>
+              <a:ext uri="{FF2B5EF4-FFF2-40B4-BE49-F238E27FC236}">
+                <a16:creationId xmlns:a16="http://schemas.microsoft.com/office/drawing/2014/main" id="{6060444E-58AF-8322-9776-96FFB609E821}"/>
+              </a:ext>
+            </a:extLst>
+          </p:cNvPr>
+          <p:cNvSpPr txBox="1"/>
+          <p:nvPr/>
+        </p:nvSpPr>
+        <p:spPr>
+          <a:xfrm>
+            <a:off x="1099058" y="2286010"/>
+            <a:ext cx="4641343" cy="3416320"/>
+          </a:xfrm>
+          <a:prstGeom prst="rect">
+            <a:avLst/>
+          </a:prstGeom>
+          <a:noFill/>
+        </p:spPr>
+        <p:txBody>
+          <a:bodyPr wrap="square" rtlCol="0">
+            <a:spAutoFit/>
+          </a:bodyPr>
+          <a:lstStyle/>
+          <a:p>
+            <a:r>
+              <a:rPr kumimoji="1" lang="ja-JP" altLang="en-US" sz="3600" dirty="0"/>
+              <a:t>目的 </a:t>
+            </a:r>
+            <a:r>
+              <a:rPr kumimoji="1" lang="en-US" altLang="ja-JP" sz="3600" dirty="0"/>
+              <a:t>: </a:t>
+            </a:r>
+            <a:r>
+              <a:rPr lang="ja-JP" altLang="en-US" sz="3600" dirty="0"/>
+              <a:t>久留米市を紹介したい理由は、豊かな自然や歴史・文化、おいしいご当地グルメなど、多くの魅力があるからです。</a:t>
+            </a:r>
+            <a:endParaRPr kumimoji="1" lang="ja-JP" altLang="en-US" sz="3600" dirty="0"/>
+          </a:p>
+        </p:txBody>
+      </p:sp>
+      <p:sp>
+        <p:nvSpPr>
+          <p:cNvPr id="4" name="テキスト ボックス 3">
+            <a:extLst>
+              <a:ext uri="{FF2B5EF4-FFF2-40B4-BE49-F238E27FC236}">
+                <a16:creationId xmlns:a16="http://schemas.microsoft.com/office/drawing/2014/main" id="{61DA5B58-E71B-40CE-60F3-3B59A86E7235}"/>
+              </a:ext>
+            </a:extLst>
+          </p:cNvPr>
+          <p:cNvSpPr txBox="1"/>
+          <p:nvPr/>
+        </p:nvSpPr>
+        <p:spPr>
+          <a:xfrm>
+            <a:off x="1210731" y="797779"/>
+            <a:ext cx="8597412" cy="769441"/>
+          </a:xfrm>
+          <a:prstGeom prst="rect">
+            <a:avLst/>
+          </a:prstGeom>
+          <a:noFill/>
+        </p:spPr>
+        <p:txBody>
+          <a:bodyPr wrap="square" rtlCol="0">
+            <a:spAutoFit/>
+          </a:bodyPr>
+          <a:lstStyle/>
+          <a:p>
+            <a:r>
+              <a:rPr kumimoji="1" lang="ja-JP" altLang="en-US" sz="4400" b="1" dirty="0">
+                <a:solidFill>
+                  <a:schemeClr val="accent1"/>
+                </a:solidFill>
+                <a:effectLst>
+                  <a:outerShdw blurRad="38100" dist="38100" dir="2700000" algn="tl">
+                    <a:srgbClr val="000000">
+                      <a:alpha val="43137"/>
+                    </a:srgbClr>
+                  </a:outerShdw>
+                </a:effectLst>
+              </a:rPr>
+              <a:t>テーマ１　「久留米市の紹介」</a:t>
+            </a:r>
+          </a:p>
+        </p:txBody>
+      </p:sp>
       <p:pic>
         <p:nvPicPr>
-          <p:cNvPr id="5" name="コンテンツ プレースホルダー 4" descr="テキスト, アイコン&#10;&#10;AI によって生成されたコンテンツは間違っている可能性があります。">
+          <p:cNvPr id="1026" name="Picture 2" descr="久留米市が熱い】観光したい！知りたい！住みたい！どんな魅力？ | もっと福岡－福岡観光・グルメ・お土産など情報サイト">
             <a:extLst>
               <a:ext uri="{FF2B5EF4-FFF2-40B4-BE49-F238E27FC236}">
-                <a16:creationId xmlns:a16="http://schemas.microsoft.com/office/drawing/2014/main" id="{280E32B7-DE09-0133-C2C2-D14A78C3BD0E}"/>
+                <a16:creationId xmlns:a16="http://schemas.microsoft.com/office/drawing/2014/main" id="{B3F0C016-42BF-9AEB-905B-E1C474B962FC}"/>
               </a:ext>
             </a:extLst>
           </p:cNvPr>
           <p:cNvPicPr>
-            <a:picLocks noChangeAspect="1"/>
+            <a:picLocks noChangeAspect="1" noChangeArrowheads="1"/>
           </p:cNvPicPr>
           <p:nvPr/>
         </p:nvPicPr>
@@ -4827,53 +4969,29 @@
               </a:ext>
             </a:extLst>
           </a:blip>
-          <a:srcRect l="2285"/>
-          <a:stretch/>
-        </p:blipFill>
-        <p:spPr>
-          <a:xfrm>
-            <a:off x="1094232" y="467297"/>
-            <a:ext cx="10003535" cy="1356464"/>
-          </a:xfrm>
-          <a:prstGeom prst="rect">
-            <a:avLst/>
-          </a:prstGeom>
-        </p:spPr>
-      </p:pic>
-      <p:pic>
-        <p:nvPicPr>
-          <p:cNvPr id="10" name="図 9" descr="テキスト">
-            <a:extLst>
-              <a:ext uri="{FF2B5EF4-FFF2-40B4-BE49-F238E27FC236}">
-                <a16:creationId xmlns:a16="http://schemas.microsoft.com/office/drawing/2014/main" id="{D01CADEB-9CB9-3D4A-8926-07368D0B7641}"/>
-              </a:ext>
-            </a:extLst>
-          </p:cNvPr>
-          <p:cNvPicPr>
-            <a:picLocks noChangeAspect="1"/>
-          </p:cNvPicPr>
-          <p:nvPr/>
-        </p:nvPicPr>
-        <p:blipFill>
-          <a:blip r:embed="rId3">
-            <a:extLst>
-              <a:ext uri="{28A0092B-C50C-407E-A947-70E740481C1C}">
-                <a14:useLocalDpi xmlns:a14="http://schemas.microsoft.com/office/drawing/2010/main" val="0"/>
-              </a:ext>
-            </a:extLst>
-          </a:blip>
+          <a:srcRect/>
           <a:stretch>
             <a:fillRect/>
           </a:stretch>
         </p:blipFill>
-        <p:spPr>
-          <a:xfrm>
-            <a:off x="1094233" y="1860337"/>
-            <a:ext cx="10003535" cy="4612888"/>
+        <p:spPr bwMode="auto">
+          <a:xfrm>
+            <a:off x="6095999" y="2371035"/>
+            <a:ext cx="4996943" cy="3331295"/>
           </a:xfrm>
           <a:prstGeom prst="rect">
             <a:avLst/>
           </a:prstGeom>
+          <a:noFill/>
+          <a:extLst>
+            <a:ext uri="{909E8E84-426E-40DD-AFC4-6F175D3DCCD1}">
+              <a14:hiddenFill xmlns:a14="http://schemas.microsoft.com/office/drawing/2010/main">
+                <a:solidFill>
+                  <a:srgbClr val="FFFFFF"/>
+                </a:solidFill>
+              </a14:hiddenFill>
+            </a:ext>
+          </a:extLst>
         </p:spPr>
       </p:pic>
     </p:spTree>
@@ -5091,10 +5209,10 @@
       </p:sp>
       <p:pic>
         <p:nvPicPr>
-          <p:cNvPr id="6" name="図 5" descr="テキスト, 手紙">
+          <p:cNvPr id="3" name="図 2">
             <a:extLst>
               <a:ext uri="{FF2B5EF4-FFF2-40B4-BE49-F238E27FC236}">
-                <a16:creationId xmlns:a16="http://schemas.microsoft.com/office/drawing/2014/main" id="{006EF07D-0246-BF5F-9F6C-800BBF669876}"/>
+                <a16:creationId xmlns:a16="http://schemas.microsoft.com/office/drawing/2014/main" id="{129C9F99-4C18-0F4B-FC87-B0200838174C}"/>
               </a:ext>
             </a:extLst>
           </p:cNvPr>
@@ -5104,21 +5222,15 @@
           <p:nvPr/>
         </p:nvPicPr>
         <p:blipFill>
-          <a:blip r:embed="rId2">
-            <a:extLst>
-              <a:ext uri="{28A0092B-C50C-407E-A947-70E740481C1C}">
-                <a14:useLocalDpi xmlns:a14="http://schemas.microsoft.com/office/drawing/2010/main" val="0"/>
-              </a:ext>
-            </a:extLst>
-          </a:blip>
+          <a:blip r:embed="rId2"/>
           <a:stretch>
             <a:fillRect/>
           </a:stretch>
         </p:blipFill>
         <p:spPr>
           <a:xfrm>
-            <a:off x="1563004" y="803063"/>
-            <a:ext cx="3610663" cy="5251874"/>
+            <a:off x="6609570" y="705063"/>
+            <a:ext cx="3675674" cy="5447874"/>
           </a:xfrm>
           <a:prstGeom prst="rect">
             <a:avLst/>
@@ -5127,10 +5239,10 @@
       </p:pic>
       <p:pic>
         <p:nvPicPr>
-          <p:cNvPr id="8" name="図 7" descr="テキスト, 手紙&#10;&#10;AI によって生成されたコンテンツは間違っている可能性があります。">
+          <p:cNvPr id="5" name="図 4" descr="テキスト, 手紙">
             <a:extLst>
               <a:ext uri="{FF2B5EF4-FFF2-40B4-BE49-F238E27FC236}">
-                <a16:creationId xmlns:a16="http://schemas.microsoft.com/office/drawing/2014/main" id="{D2673732-686F-AE4B-3D60-4B808CA07251}"/>
+                <a16:creationId xmlns:a16="http://schemas.microsoft.com/office/drawing/2014/main" id="{4296A364-CE99-33C6-BCA1-4213AF2E015E}"/>
               </a:ext>
             </a:extLst>
           </p:cNvPr>
@@ -5153,14 +5265,60 @@
         </p:blipFill>
         <p:spPr>
           <a:xfrm>
-            <a:off x="6854953" y="1567323"/>
-            <a:ext cx="3697224" cy="3723353"/>
+            <a:off x="1373682" y="2400951"/>
+            <a:ext cx="3675674" cy="3751986"/>
           </a:xfrm>
           <a:prstGeom prst="rect">
             <a:avLst/>
           </a:prstGeom>
         </p:spPr>
       </p:pic>
+      <p:sp>
+        <p:nvSpPr>
+          <p:cNvPr id="7" name="テキスト ボックス 6">
+            <a:extLst>
+              <a:ext uri="{FF2B5EF4-FFF2-40B4-BE49-F238E27FC236}">
+                <a16:creationId xmlns:a16="http://schemas.microsoft.com/office/drawing/2014/main" id="{1AF1B7EF-1475-4401-22FC-0C5C9F0EE513}"/>
+              </a:ext>
+            </a:extLst>
+          </p:cNvPr>
+          <p:cNvSpPr txBox="1"/>
+          <p:nvPr/>
+        </p:nvSpPr>
+        <p:spPr>
+          <a:xfrm>
+            <a:off x="706859" y="705063"/>
+            <a:ext cx="5009320" cy="923330"/>
+          </a:xfrm>
+          <a:prstGeom prst="rect">
+            <a:avLst/>
+          </a:prstGeom>
+          <a:noFill/>
+        </p:spPr>
+        <p:txBody>
+          <a:bodyPr wrap="square" rtlCol="0">
+            <a:spAutoFit/>
+          </a:bodyPr>
+          <a:lstStyle/>
+          <a:p>
+            <a:r>
+              <a:rPr kumimoji="1" lang="ja-JP" altLang="en-US" sz="5400" b="1" dirty="0">
+                <a:solidFill>
+                  <a:schemeClr val="accent1"/>
+                </a:solidFill>
+                <a:effectLst>
+                  <a:outerShdw blurRad="38100" dist="38100" dir="2700000" algn="tl">
+                    <a:srgbClr val="000000">
+                      <a:alpha val="43137"/>
+                    </a:srgbClr>
+                  </a:outerShdw>
+                </a:effectLst>
+              </a:rPr>
+              <a:t>ページ内容紹介</a:t>
+            </a:r>
+          </a:p>
+        </p:txBody>
+      </p:sp>
     </p:spTree>
     <p:extLst>
       <p:ext uri="{BB962C8B-B14F-4D97-AF65-F5344CB8AC3E}">
@@ -5175,186 +5333,6 @@
 </file>
 
 <file path=ppt/slides/slide4.xml><?xml version="1.0" encoding="utf-8"?>
-<p:sld xmlns:a="http://schemas.openxmlformats.org/drawingml/2006/main" xmlns:r="http://schemas.openxmlformats.org/officeDocument/2006/relationships" xmlns:p="http://schemas.openxmlformats.org/presentationml/2006/main">
-  <p:cSld>
-    <p:spTree>
-      <p:nvGrpSpPr>
-        <p:cNvPr id="1" name=""/>
-        <p:cNvGrpSpPr/>
-        <p:nvPr/>
-      </p:nvGrpSpPr>
-      <p:grpSpPr>
-        <a:xfrm>
-          <a:off x="0" y="0"/>
-          <a:ext cx="0" cy="0"/>
-          <a:chOff x="0" y="0"/>
-          <a:chExt cx="0" cy="0"/>
-        </a:xfrm>
-      </p:grpSpPr>
-      <p:pic>
-        <p:nvPicPr>
-          <p:cNvPr id="5" name="図 4" descr="グラフィカル ユーザー インターフェイス, Web サイト">
-            <a:extLst>
-              <a:ext uri="{FF2B5EF4-FFF2-40B4-BE49-F238E27FC236}">
-                <a16:creationId xmlns:a16="http://schemas.microsoft.com/office/drawing/2014/main" id="{56928F0D-9E34-59BD-FE7F-B7211BF67A26}"/>
-              </a:ext>
-            </a:extLst>
-          </p:cNvPr>
-          <p:cNvPicPr>
-            <a:picLocks noChangeAspect="1"/>
-          </p:cNvPicPr>
-          <p:nvPr/>
-        </p:nvPicPr>
-        <p:blipFill>
-          <a:blip r:embed="rId2">
-            <a:extLst>
-              <a:ext uri="{28A0092B-C50C-407E-A947-70E740481C1C}">
-                <a14:useLocalDpi xmlns:a14="http://schemas.microsoft.com/office/drawing/2010/main" val="0"/>
-              </a:ext>
-            </a:extLst>
-          </a:blip>
-          <a:stretch>
-            <a:fillRect/>
-          </a:stretch>
-        </p:blipFill>
-        <p:spPr>
-          <a:xfrm>
-            <a:off x="228305" y="232034"/>
-            <a:ext cx="4270543" cy="6405814"/>
-          </a:xfrm>
-          <a:prstGeom prst="rect">
-            <a:avLst/>
-          </a:prstGeom>
-        </p:spPr>
-      </p:pic>
-      <p:sp>
-        <p:nvSpPr>
-          <p:cNvPr id="6" name="テキスト ボックス 5">
-            <a:extLst>
-              <a:ext uri="{FF2B5EF4-FFF2-40B4-BE49-F238E27FC236}">
-                <a16:creationId xmlns:a16="http://schemas.microsoft.com/office/drawing/2014/main" id="{297FF504-AA08-694D-2396-AFD415DA45A9}"/>
-              </a:ext>
-            </a:extLst>
-          </p:cNvPr>
-          <p:cNvSpPr txBox="1"/>
-          <p:nvPr/>
-        </p:nvSpPr>
-        <p:spPr>
-          <a:xfrm>
-            <a:off x="5276850" y="2103120"/>
-            <a:ext cx="5905500" cy="646331"/>
-          </a:xfrm>
-          <a:prstGeom prst="rect">
-            <a:avLst/>
-          </a:prstGeom>
-          <a:noFill/>
-        </p:spPr>
-        <p:txBody>
-          <a:bodyPr wrap="square" rtlCol="0">
-            <a:spAutoFit/>
-          </a:bodyPr>
-          <a:lstStyle/>
-          <a:p>
-            <a:r>
-              <a:rPr kumimoji="1" lang="ja-JP" altLang="en-US" dirty="0"/>
-              <a:t>ページのヘッダーを最初に作り、どのページにも使える基盤を作る。</a:t>
-            </a:r>
-          </a:p>
-        </p:txBody>
-      </p:sp>
-      <p:sp>
-        <p:nvSpPr>
-          <p:cNvPr id="7" name="テキスト ボックス 6">
-            <a:extLst>
-              <a:ext uri="{FF2B5EF4-FFF2-40B4-BE49-F238E27FC236}">
-                <a16:creationId xmlns:a16="http://schemas.microsoft.com/office/drawing/2014/main" id="{CA17A711-5FC6-1675-3783-665B61F249E3}"/>
-              </a:ext>
-            </a:extLst>
-          </p:cNvPr>
-          <p:cNvSpPr txBox="1"/>
-          <p:nvPr/>
-        </p:nvSpPr>
-        <p:spPr>
-          <a:xfrm>
-            <a:off x="5276850" y="3105834"/>
-            <a:ext cx="5905500" cy="646331"/>
-          </a:xfrm>
-          <a:prstGeom prst="rect">
-            <a:avLst/>
-          </a:prstGeom>
-          <a:noFill/>
-        </p:spPr>
-        <p:txBody>
-          <a:bodyPr wrap="square" rtlCol="0">
-            <a:spAutoFit/>
-          </a:bodyPr>
-          <a:lstStyle/>
-          <a:p>
-            <a:r>
-              <a:rPr kumimoji="1" lang="ja-JP" altLang="en-US" dirty="0"/>
-              <a:t>自分が撮った写真などを貼り付けて、各ページごとに文字で説明する。</a:t>
-            </a:r>
-            <a:endParaRPr kumimoji="1" lang="en-US" altLang="ja-JP" dirty="0"/>
-          </a:p>
-        </p:txBody>
-      </p:sp>
-      <p:sp>
-        <p:nvSpPr>
-          <p:cNvPr id="8" name="テキスト ボックス 7">
-            <a:extLst>
-              <a:ext uri="{FF2B5EF4-FFF2-40B4-BE49-F238E27FC236}">
-                <a16:creationId xmlns:a16="http://schemas.microsoft.com/office/drawing/2014/main" id="{3D741F1A-FC0F-2423-078B-3F8E880F387B}"/>
-              </a:ext>
-            </a:extLst>
-          </p:cNvPr>
-          <p:cNvSpPr txBox="1"/>
-          <p:nvPr/>
-        </p:nvSpPr>
-        <p:spPr>
-          <a:xfrm>
-            <a:off x="5367528" y="694944"/>
-            <a:ext cx="5596128" cy="369332"/>
-          </a:xfrm>
-          <a:prstGeom prst="rect">
-            <a:avLst/>
-          </a:prstGeom>
-          <a:noFill/>
-        </p:spPr>
-        <p:txBody>
-          <a:bodyPr wrap="square" rtlCol="0">
-            <a:spAutoFit/>
-          </a:bodyPr>
-          <a:lstStyle/>
-          <a:p>
-            <a:r>
-              <a:rPr kumimoji="1" lang="ja-JP" altLang="en-US" dirty="0"/>
-              <a:t>合計</a:t>
-            </a:r>
-            <a:r>
-              <a:rPr kumimoji="1" lang="en-US" altLang="ja-JP" dirty="0"/>
-              <a:t>5</a:t>
-            </a:r>
-            <a:r>
-              <a:rPr kumimoji="1" lang="ja-JP" altLang="en-US" dirty="0"/>
-              <a:t>ページ作る</a:t>
-            </a:r>
-          </a:p>
-        </p:txBody>
-      </p:sp>
-    </p:spTree>
-    <p:extLst>
-      <p:ext uri="{BB962C8B-B14F-4D97-AF65-F5344CB8AC3E}">
-        <p14:creationId xmlns:p14="http://schemas.microsoft.com/office/powerpoint/2010/main" val="2945730443"/>
-      </p:ext>
-    </p:extLst>
-  </p:cSld>
-  <p:clrMapOvr>
-    <a:masterClrMapping/>
-  </p:clrMapOvr>
-</p:sld>
-</file>
-
-<file path=ppt/slides/slide5.xml><?xml version="1.0" encoding="utf-8"?>
 <p:sld xmlns:a="http://schemas.openxmlformats.org/drawingml/2006/main" xmlns:r="http://schemas.openxmlformats.org/officeDocument/2006/relationships" xmlns:p="http://schemas.openxmlformats.org/presentationml/2006/main">
   <p:cSld>
     <p:spTree>
@@ -5377,12 +5355,170 @@
           <a:chExt cx="0" cy="0"/>
         </a:xfrm>
       </p:grpSpPr>
+      <p:sp>
+        <p:nvSpPr>
+          <p:cNvPr id="2" name="正方形/長方形 1">
+            <a:extLst>
+              <a:ext uri="{FF2B5EF4-FFF2-40B4-BE49-F238E27FC236}">
+                <a16:creationId xmlns:a16="http://schemas.microsoft.com/office/drawing/2014/main" id="{D3D53003-5D30-54AD-1744-5E18C9FEDD4C}"/>
+              </a:ext>
+            </a:extLst>
+          </p:cNvPr>
+          <p:cNvSpPr/>
+          <p:nvPr/>
+        </p:nvSpPr>
+        <p:spPr>
+          <a:xfrm>
+            <a:off x="457282" y="436879"/>
+            <a:ext cx="11277435" cy="5984242"/>
+          </a:xfrm>
+          <a:prstGeom prst="rect">
+            <a:avLst/>
+          </a:prstGeom>
+          <a:ln>
+            <a:solidFill>
+              <a:schemeClr val="bg1"/>
+            </a:solidFill>
+          </a:ln>
+        </p:spPr>
+        <p:style>
+          <a:lnRef idx="2">
+            <a:schemeClr val="accent1">
+              <a:shade val="15000"/>
+            </a:schemeClr>
+          </a:lnRef>
+          <a:fillRef idx="1001">
+            <a:schemeClr val="lt1"/>
+          </a:fillRef>
+          <a:effectRef idx="0">
+            <a:schemeClr val="accent1"/>
+          </a:effectRef>
+          <a:fontRef idx="minor">
+            <a:schemeClr val="lt1"/>
+          </a:fontRef>
+        </p:style>
+        <p:txBody>
+          <a:bodyPr rtlCol="0" anchor="ctr"/>
+          <a:lstStyle/>
+          <a:p>
+            <a:pPr algn="ctr"/>
+            <a:endParaRPr kumimoji="1" lang="ja-JP" altLang="en-US" dirty="0"/>
+          </a:p>
+        </p:txBody>
+      </p:sp>
+      <p:sp>
+        <p:nvSpPr>
+          <p:cNvPr id="8" name="テキスト ボックス 7">
+            <a:extLst>
+              <a:ext uri="{FF2B5EF4-FFF2-40B4-BE49-F238E27FC236}">
+                <a16:creationId xmlns:a16="http://schemas.microsoft.com/office/drawing/2014/main" id="{AED0C998-99C8-C7E6-F4C6-2F9B862CA89F}"/>
+              </a:ext>
+            </a:extLst>
+          </p:cNvPr>
+          <p:cNvSpPr txBox="1"/>
+          <p:nvPr/>
+        </p:nvSpPr>
+        <p:spPr>
+          <a:xfrm>
+            <a:off x="1521882" y="766858"/>
+            <a:ext cx="9423486" cy="769441"/>
+          </a:xfrm>
+          <a:prstGeom prst="rect">
+            <a:avLst/>
+          </a:prstGeom>
+          <a:noFill/>
+        </p:spPr>
+        <p:txBody>
+          <a:bodyPr wrap="square">
+            <a:spAutoFit/>
+          </a:bodyPr>
+          <a:lstStyle/>
+          <a:p>
+            <a:pPr marL="0" marR="0" lvl="0" indent="0" algn="l" defTabSz="457200" rtl="0" eaLnBrk="1" fontAlgn="auto" latinLnBrk="0" hangingPunct="1">
+              <a:lnSpc>
+                <a:spcPct val="100000"/>
+              </a:lnSpc>
+              <a:spcBef>
+                <a:spcPts val="0"/>
+              </a:spcBef>
+              <a:spcAft>
+                <a:spcPts val="0"/>
+              </a:spcAft>
+              <a:buClrTx/>
+              <a:buSzTx/>
+              <a:buFontTx/>
+              <a:buNone/>
+              <a:tabLst/>
+              <a:defRPr/>
+            </a:pPr>
+            <a:r>
+              <a:rPr kumimoji="1" lang="ja-JP" altLang="en-US" sz="4400" b="1" i="0" u="none" strike="noStrike" kern="1200" cap="none" spc="0" normalizeH="0" baseline="0" noProof="0" dirty="0">
+                <a:ln>
+                  <a:noFill/>
+                </a:ln>
+                <a:solidFill>
+                  <a:schemeClr val="accent1"/>
+                </a:solidFill>
+                <a:effectLst>
+                  <a:outerShdw blurRad="38100" dist="38100" dir="2700000" algn="tl">
+                    <a:srgbClr val="000000">
+                      <a:alpha val="43137"/>
+                    </a:srgbClr>
+                  </a:outerShdw>
+                </a:effectLst>
+                <a:uLnTx/>
+                <a:uFillTx/>
+                <a:latin typeface="Century Gothic" panose="020B0502020202020204"/>
+                <a:ea typeface="ＭＳ ゴシック" panose="020B0609070205080204" pitchFamily="49" charset="-128"/>
+                <a:cs typeface="+mn-cs"/>
+              </a:rPr>
+              <a:t>テーマ２　「地域別の食べ物紹介」</a:t>
+            </a:r>
+          </a:p>
+        </p:txBody>
+      </p:sp>
+      <p:sp>
+        <p:nvSpPr>
+          <p:cNvPr id="12" name="テキスト ボックス 11">
+            <a:extLst>
+              <a:ext uri="{FF2B5EF4-FFF2-40B4-BE49-F238E27FC236}">
+                <a16:creationId xmlns:a16="http://schemas.microsoft.com/office/drawing/2014/main" id="{03B4871C-AAEA-4F7A-D90A-CB336C0DFDAF}"/>
+              </a:ext>
+            </a:extLst>
+          </p:cNvPr>
+          <p:cNvSpPr txBox="1"/>
+          <p:nvPr/>
+        </p:nvSpPr>
+        <p:spPr>
+          <a:xfrm>
+            <a:off x="1265850" y="1987798"/>
+            <a:ext cx="5486400" cy="3785652"/>
+          </a:xfrm>
+          <a:prstGeom prst="rect">
+            <a:avLst/>
+          </a:prstGeom>
+          <a:noFill/>
+        </p:spPr>
+        <p:txBody>
+          <a:bodyPr wrap="square" rtlCol="0">
+            <a:spAutoFit/>
+          </a:bodyPr>
+          <a:lstStyle/>
+          <a:p>
+            <a:r>
+              <a:rPr lang="ja-JP" altLang="en-US" sz="4000" dirty="0"/>
+              <a:t>地域別の食べ物を紹介したい理由は、その土地ならではの食材や伝統料理を知ってもらい、地域の魅力を感じてもらいたいからです。</a:t>
+            </a:r>
+            <a:endParaRPr kumimoji="1" lang="ja-JP" altLang="en-US" sz="4000" dirty="0"/>
+          </a:p>
+        </p:txBody>
+      </p:sp>
       <p:pic>
         <p:nvPicPr>
-          <p:cNvPr id="3" name="図 2">
+          <p:cNvPr id="16" name="図 15" descr="皿の上にあるスープ">
             <a:extLst>
               <a:ext uri="{FF2B5EF4-FFF2-40B4-BE49-F238E27FC236}">
-                <a16:creationId xmlns:a16="http://schemas.microsoft.com/office/drawing/2014/main" id="{523E0849-36CC-3402-7477-3B9F2768BDB7}"/>
+                <a16:creationId xmlns:a16="http://schemas.microsoft.com/office/drawing/2014/main" id="{F932AFC2-1DD1-650E-56E2-A52AD987A02B}"/>
               </a:ext>
             </a:extLst>
           </p:cNvPr>
@@ -5405,44 +5541,8 @@
         </p:blipFill>
         <p:spPr>
           <a:xfrm>
-            <a:off x="603168" y="1003797"/>
-            <a:ext cx="10985664" cy="1130358"/>
-          </a:xfrm>
-          <a:prstGeom prst="rect">
-            <a:avLst/>
-          </a:prstGeom>
-        </p:spPr>
-      </p:pic>
-      <p:pic>
-        <p:nvPicPr>
-          <p:cNvPr id="6" name="図 5" descr="グラフィカル ユーザー インターフェイス, テキスト, アプリケーション">
-            <a:extLst>
-              <a:ext uri="{FF2B5EF4-FFF2-40B4-BE49-F238E27FC236}">
-                <a16:creationId xmlns:a16="http://schemas.microsoft.com/office/drawing/2014/main" id="{14F622A3-7217-0EC7-A765-B1F7DA1CBAAB}"/>
-              </a:ext>
-            </a:extLst>
-          </p:cNvPr>
-          <p:cNvPicPr>
-            <a:picLocks noChangeAspect="1"/>
-          </p:cNvPicPr>
-          <p:nvPr/>
-        </p:nvPicPr>
-        <p:blipFill>
-          <a:blip r:embed="rId3">
-            <a:extLst>
-              <a:ext uri="{28A0092B-C50C-407E-A947-70E740481C1C}">
-                <a14:useLocalDpi xmlns:a14="http://schemas.microsoft.com/office/drawing/2010/main" val="0"/>
-              </a:ext>
-            </a:extLst>
-          </a:blip>
-          <a:stretch>
-            <a:fillRect/>
-          </a:stretch>
-        </p:blipFill>
-        <p:spPr>
-          <a:xfrm>
-            <a:off x="603169" y="2134155"/>
-            <a:ext cx="10985663" cy="3872174"/>
+            <a:off x="6997428" y="2453571"/>
+            <a:ext cx="4305095" cy="2855291"/>
           </a:xfrm>
           <a:prstGeom prst="rect">
             <a:avLst/>
@@ -5453,6 +5553,345 @@
     <p:extLst>
       <p:ext uri="{BB962C8B-B14F-4D97-AF65-F5344CB8AC3E}">
         <p14:creationId xmlns:p14="http://schemas.microsoft.com/office/powerpoint/2010/main" val="755222973"/>
+      </p:ext>
+    </p:extLst>
+  </p:cSld>
+  <p:clrMapOvr>
+    <a:masterClrMapping/>
+  </p:clrMapOvr>
+</p:sld>
+</file>
+
+<file path=ppt/slides/slide5.xml><?xml version="1.0" encoding="utf-8"?>
+<p:sld xmlns:a="http://schemas.openxmlformats.org/drawingml/2006/main" xmlns:r="http://schemas.openxmlformats.org/officeDocument/2006/relationships" xmlns:p="http://schemas.openxmlformats.org/presentationml/2006/main">
+  <p:cSld>
+    <p:bg>
+      <p:bgPr>
+        <a:solidFill>
+          <a:schemeClr val="bg1"/>
+        </a:solidFill>
+        <a:effectLst/>
+      </p:bgPr>
+    </p:bg>
+    <p:spTree>
+      <p:nvGrpSpPr>
+        <p:cNvPr id="1" name="">
+          <a:extLst>
+            <a:ext uri="{FF2B5EF4-FFF2-40B4-BE49-F238E27FC236}">
+              <a16:creationId xmlns:a16="http://schemas.microsoft.com/office/drawing/2014/main" id="{3A04EA2E-E38E-1A4E-7683-F00C423A32E0}"/>
+            </a:ext>
+          </a:extLst>
+        </p:cNvPr>
+        <p:cNvGrpSpPr/>
+        <p:nvPr/>
+      </p:nvGrpSpPr>
+      <p:grpSpPr>
+        <a:xfrm>
+          <a:off x="0" y="0"/>
+          <a:ext cx="0" cy="0"/>
+          <a:chOff x="0" y="0"/>
+          <a:chExt cx="0" cy="0"/>
+        </a:xfrm>
+      </p:grpSpPr>
+      <p:sp>
+        <p:nvSpPr>
+          <p:cNvPr id="13" name="Rectangle 12">
+            <a:extLst>
+              <a:ext uri="{FF2B5EF4-FFF2-40B4-BE49-F238E27FC236}">
+                <a16:creationId xmlns:a16="http://schemas.microsoft.com/office/drawing/2014/main" id="{6CB6ECF1-2FF9-98A4-20DD-CD570C29E276}"/>
+              </a:ext>
+              <a:ext uri="{C183D7F6-B498-43B3-948B-1728B52AA6E4}">
+                <adec:decorative xmlns:adec="http://schemas.microsoft.com/office/drawing/2017/decorative" val="1"/>
+              </a:ext>
+            </a:extLst>
+          </p:cNvPr>
+          <p:cNvSpPr>
+            <a:spLocks noGrp="1" noRot="1" noChangeAspect="1" noMove="1" noResize="1" noEditPoints="1" noAdjustHandles="1" noChangeArrowheads="1" noChangeShapeType="1" noTextEdit="1"/>
+          </p:cNvSpPr>
+          <p:nvPr>
+            <p:extLst>
+              <p:ext uri="{386F3935-93C4-4BCD-93E2-E3B085C9AB24}">
+                <p16:designElem xmlns:p16="http://schemas.microsoft.com/office/powerpoint/2015/main" val="1"/>
+              </p:ext>
+            </p:extLst>
+          </p:nvPr>
+        </p:nvSpPr>
+        <p:spPr>
+          <a:xfrm>
+            <a:off x="234696" y="237744"/>
+            <a:ext cx="11722608" cy="6382512"/>
+          </a:xfrm>
+          <a:prstGeom prst="rect">
+            <a:avLst/>
+          </a:prstGeom>
+          <a:solidFill>
+            <a:schemeClr val="bg2"/>
+          </a:solidFill>
+          <a:ln w="6350" cap="flat" cmpd="sng" algn="ctr">
+            <a:noFill/>
+            <a:prstDash val="solid"/>
+          </a:ln>
+          <a:effectLst>
+            <a:softEdge rad="0"/>
+          </a:effectLst>
+        </p:spPr>
+        <p:txBody>
+          <a:bodyPr/>
+          <a:lstStyle/>
+          <a:p>
+            <a:endParaRPr lang="ja-JP" altLang="en-US"/>
+          </a:p>
+        </p:txBody>
+      </p:sp>
+      <p:sp>
+        <p:nvSpPr>
+          <p:cNvPr id="15" name="Rectangle 14">
+            <a:extLst>
+              <a:ext uri="{FF2B5EF4-FFF2-40B4-BE49-F238E27FC236}">
+                <a16:creationId xmlns:a16="http://schemas.microsoft.com/office/drawing/2014/main" id="{6A7522B1-4030-9DBE-5C52-6AF71178E388}"/>
+              </a:ext>
+              <a:ext uri="{C183D7F6-B498-43B3-948B-1728B52AA6E4}">
+                <adec:decorative xmlns:adec="http://schemas.microsoft.com/office/drawing/2017/decorative" val="1"/>
+              </a:ext>
+            </a:extLst>
+          </p:cNvPr>
+          <p:cNvSpPr>
+            <a:spLocks noGrp="1" noRot="1" noChangeAspect="1" noMove="1" noResize="1" noEditPoints="1" noAdjustHandles="1" noChangeArrowheads="1" noChangeShapeType="1" noTextEdit="1"/>
+          </p:cNvSpPr>
+          <p:nvPr>
+            <p:extLst>
+              <p:ext uri="{386F3935-93C4-4BCD-93E2-E3B085C9AB24}">
+                <p16:designElem xmlns:p16="http://schemas.microsoft.com/office/powerpoint/2015/main" val="1"/>
+              </p:ext>
+            </p:extLst>
+          </p:nvPr>
+        </p:nvSpPr>
+        <p:spPr>
+          <a:xfrm>
+            <a:off x="0" y="0"/>
+            <a:ext cx="12192000" cy="6858000"/>
+          </a:xfrm>
+          <a:prstGeom prst="rect">
+            <a:avLst/>
+          </a:prstGeom>
+          <a:solidFill>
+            <a:schemeClr val="bg2"/>
+          </a:solidFill>
+          <a:ln>
+            <a:noFill/>
+          </a:ln>
+        </p:spPr>
+        <p:style>
+          <a:lnRef idx="2">
+            <a:schemeClr val="accent1">
+              <a:shade val="50000"/>
+            </a:schemeClr>
+          </a:lnRef>
+          <a:fillRef idx="1">
+            <a:schemeClr val="accent1"/>
+          </a:fillRef>
+          <a:effectRef idx="0">
+            <a:schemeClr val="accent1"/>
+          </a:effectRef>
+          <a:fontRef idx="minor">
+            <a:schemeClr val="lt1"/>
+          </a:fontRef>
+        </p:style>
+        <p:txBody>
+          <a:bodyPr rtlCol="0" anchor="ctr"/>
+          <a:lstStyle/>
+          <a:p>
+            <a:pPr algn="ctr"/>
+            <a:endParaRPr lang="en-US"/>
+          </a:p>
+        </p:txBody>
+      </p:sp>
+      <p:sp useBgFill="1">
+        <p:nvSpPr>
+          <p:cNvPr id="17" name="Rectangle 16">
+            <a:extLst>
+              <a:ext uri="{FF2B5EF4-FFF2-40B4-BE49-F238E27FC236}">
+                <a16:creationId xmlns:a16="http://schemas.microsoft.com/office/drawing/2014/main" id="{76E94AF0-43C9-5474-2562-F5D453C90B30}"/>
+              </a:ext>
+              <a:ext uri="{C183D7F6-B498-43B3-948B-1728B52AA6E4}">
+                <adec:decorative xmlns:adec="http://schemas.microsoft.com/office/drawing/2017/decorative" val="1"/>
+              </a:ext>
+            </a:extLst>
+          </p:cNvPr>
+          <p:cNvSpPr>
+            <a:spLocks noGrp="1" noRot="1" noChangeAspect="1" noMove="1" noResize="1" noEditPoints="1" noAdjustHandles="1" noChangeArrowheads="1" noChangeShapeType="1" noTextEdit="1"/>
+          </p:cNvSpPr>
+          <p:nvPr>
+            <p:extLst>
+              <p:ext uri="{386F3935-93C4-4BCD-93E2-E3B085C9AB24}">
+                <p16:designElem xmlns:p16="http://schemas.microsoft.com/office/powerpoint/2015/main" val="1"/>
+              </p:ext>
+            </p:extLst>
+          </p:nvPr>
+        </p:nvSpPr>
+        <p:spPr>
+          <a:xfrm>
+            <a:off x="477012" y="480060"/>
+            <a:ext cx="11237976" cy="5897880"/>
+          </a:xfrm>
+          <a:prstGeom prst="rect">
+            <a:avLst/>
+          </a:prstGeom>
+          <a:ln>
+            <a:solidFill>
+              <a:srgbClr val="FFFFFF"/>
+            </a:solidFill>
+          </a:ln>
+        </p:spPr>
+        <p:style>
+          <a:lnRef idx="2">
+            <a:schemeClr val="accent1">
+              <a:shade val="50000"/>
+            </a:schemeClr>
+          </a:lnRef>
+          <a:fillRef idx="1">
+            <a:schemeClr val="accent1"/>
+          </a:fillRef>
+          <a:effectRef idx="0">
+            <a:schemeClr val="accent1"/>
+          </a:effectRef>
+          <a:fontRef idx="minor">
+            <a:schemeClr val="lt1"/>
+          </a:fontRef>
+        </p:style>
+        <p:txBody>
+          <a:bodyPr rtlCol="0" anchor="ctr"/>
+          <a:lstStyle/>
+          <a:p>
+            <a:pPr algn="ctr"/>
+            <a:endParaRPr lang="en-US"/>
+          </a:p>
+        </p:txBody>
+      </p:sp>
+      <p:sp>
+        <p:nvSpPr>
+          <p:cNvPr id="7" name="テキスト ボックス 6">
+            <a:extLst>
+              <a:ext uri="{FF2B5EF4-FFF2-40B4-BE49-F238E27FC236}">
+                <a16:creationId xmlns:a16="http://schemas.microsoft.com/office/drawing/2014/main" id="{2C00FDDE-781A-EC2B-9964-9C6DFC6CFE4F}"/>
+              </a:ext>
+            </a:extLst>
+          </p:cNvPr>
+          <p:cNvSpPr txBox="1"/>
+          <p:nvPr/>
+        </p:nvSpPr>
+        <p:spPr>
+          <a:xfrm>
+            <a:off x="706859" y="705063"/>
+            <a:ext cx="5009320" cy="923330"/>
+          </a:xfrm>
+          <a:prstGeom prst="rect">
+            <a:avLst/>
+          </a:prstGeom>
+          <a:noFill/>
+        </p:spPr>
+        <p:txBody>
+          <a:bodyPr wrap="square" rtlCol="0">
+            <a:spAutoFit/>
+          </a:bodyPr>
+          <a:lstStyle/>
+          <a:p>
+            <a:r>
+              <a:rPr kumimoji="1" lang="ja-JP" altLang="en-US" sz="5400" b="1" dirty="0">
+                <a:solidFill>
+                  <a:schemeClr val="accent1"/>
+                </a:solidFill>
+                <a:effectLst>
+                  <a:outerShdw blurRad="38100" dist="38100" dir="2700000" algn="tl">
+                    <a:srgbClr val="000000">
+                      <a:alpha val="43137"/>
+                    </a:srgbClr>
+                  </a:outerShdw>
+                </a:effectLst>
+              </a:rPr>
+              <a:t>ページ内容紹介</a:t>
+            </a:r>
+          </a:p>
+        </p:txBody>
+      </p:sp>
+      <p:sp>
+        <p:nvSpPr>
+          <p:cNvPr id="2" name="テキスト ボックス 1">
+            <a:extLst>
+              <a:ext uri="{FF2B5EF4-FFF2-40B4-BE49-F238E27FC236}">
+                <a16:creationId xmlns:a16="http://schemas.microsoft.com/office/drawing/2014/main" id="{6BE1732F-D8D1-C124-AA61-589B1F9300E4}"/>
+              </a:ext>
+            </a:extLst>
+          </p:cNvPr>
+          <p:cNvSpPr txBox="1"/>
+          <p:nvPr/>
+        </p:nvSpPr>
+        <p:spPr>
+          <a:xfrm>
+            <a:off x="1243584" y="2305049"/>
+            <a:ext cx="8010144" cy="1200329"/>
+          </a:xfrm>
+          <a:prstGeom prst="rect">
+            <a:avLst/>
+          </a:prstGeom>
+          <a:noFill/>
+        </p:spPr>
+        <p:txBody>
+          <a:bodyPr wrap="square" rtlCol="0">
+            <a:spAutoFit/>
+          </a:bodyPr>
+          <a:lstStyle/>
+          <a:p>
+            <a:r>
+              <a:rPr kumimoji="1" lang="ja-JP" altLang="en-US" sz="3600" dirty="0"/>
+              <a:t>九州や関東、東北など地域別のページを一つずつ作る。</a:t>
+            </a:r>
+          </a:p>
+        </p:txBody>
+      </p:sp>
+      <p:sp>
+        <p:nvSpPr>
+          <p:cNvPr id="6" name="テキスト ボックス 5">
+            <a:extLst>
+              <a:ext uri="{FF2B5EF4-FFF2-40B4-BE49-F238E27FC236}">
+                <a16:creationId xmlns:a16="http://schemas.microsoft.com/office/drawing/2014/main" id="{371B74FA-6DA2-4222-0F41-68E925E99198}"/>
+              </a:ext>
+            </a:extLst>
+          </p:cNvPr>
+          <p:cNvSpPr txBox="1"/>
+          <p:nvPr/>
+        </p:nvSpPr>
+        <p:spPr>
+          <a:xfrm>
+            <a:off x="1243584" y="4182034"/>
+            <a:ext cx="8001000" cy="646331"/>
+          </a:xfrm>
+          <a:prstGeom prst="rect">
+            <a:avLst/>
+          </a:prstGeom>
+          <a:noFill/>
+        </p:spPr>
+        <p:txBody>
+          <a:bodyPr wrap="square" rtlCol="0">
+            <a:spAutoFit/>
+          </a:bodyPr>
+          <a:lstStyle/>
+          <a:p>
+            <a:r>
+              <a:rPr kumimoji="1" lang="ja-JP" altLang="en-US" sz="3600" dirty="0"/>
+              <a:t>オススメのお土産を紹介する</a:t>
+            </a:r>
+            <a:r>
+              <a:rPr kumimoji="1" lang="ja-JP" altLang="en-US" dirty="0"/>
+              <a:t>。</a:t>
+            </a:r>
+          </a:p>
+        </p:txBody>
+      </p:sp>
+    </p:spTree>
+    <p:extLst>
+      <p:ext uri="{BB962C8B-B14F-4D97-AF65-F5344CB8AC3E}">
+        <p14:creationId xmlns:p14="http://schemas.microsoft.com/office/powerpoint/2010/main" val="623433002"/>
       </p:ext>
     </p:extLst>
   </p:cSld>
@@ -5481,54 +5920,534 @@
       </p:grpSpPr>
       <p:sp>
         <p:nvSpPr>
-          <p:cNvPr id="2" name="タイトル 1">
+          <p:cNvPr id="6" name="テキスト ボックス 5">
             <a:extLst>
               <a:ext uri="{FF2B5EF4-FFF2-40B4-BE49-F238E27FC236}">
-                <a16:creationId xmlns:a16="http://schemas.microsoft.com/office/drawing/2014/main" id="{5E429841-D2B9-8A64-4EA0-7BA156B4A548}"/>
+                <a16:creationId xmlns:a16="http://schemas.microsoft.com/office/drawing/2014/main" id="{297FF504-AA08-694D-2396-AFD415DA45A9}"/>
               </a:ext>
             </a:extLst>
           </p:cNvPr>
-          <p:cNvSpPr>
-            <a:spLocks noGrp="1"/>
-          </p:cNvSpPr>
-          <p:nvPr>
-            <p:ph type="title"/>
-          </p:nvPr>
-        </p:nvSpPr>
-        <p:spPr/>
-        <p:txBody>
-          <a:bodyPr/>
+          <p:cNvSpPr txBox="1"/>
+          <p:nvPr/>
+        </p:nvSpPr>
+        <p:spPr>
+          <a:xfrm>
+            <a:off x="5276850" y="4240461"/>
+            <a:ext cx="5905500" cy="954107"/>
+          </a:xfrm>
+          <a:prstGeom prst="rect">
+            <a:avLst/>
+          </a:prstGeom>
+          <a:noFill/>
+        </p:spPr>
+        <p:txBody>
+          <a:bodyPr wrap="square" rtlCol="0">
+            <a:spAutoFit/>
+          </a:bodyPr>
           <a:lstStyle/>
           <a:p>
-            <a:endParaRPr kumimoji="1" lang="ja-JP" altLang="en-US" dirty="0"/>
-          </a:p>
-        </p:txBody>
-      </p:sp>
-      <p:sp>
-        <p:nvSpPr>
-          <p:cNvPr id="3" name="コンテンツ プレースホルダー 2">
+            <a:r>
+              <a:rPr kumimoji="1" lang="ja-JP" altLang="en-US" sz="2800" dirty="0"/>
+              <a:t>ページのヘッダーを最初に作り、どのページにも使える基盤を作る。</a:t>
+            </a:r>
+          </a:p>
+        </p:txBody>
+      </p:sp>
+      <p:sp>
+        <p:nvSpPr>
+          <p:cNvPr id="7" name="テキスト ボックス 6">
             <a:extLst>
               <a:ext uri="{FF2B5EF4-FFF2-40B4-BE49-F238E27FC236}">
-                <a16:creationId xmlns:a16="http://schemas.microsoft.com/office/drawing/2014/main" id="{9720D051-EE52-3920-5F72-8EBE078C7FE8}"/>
+                <a16:creationId xmlns:a16="http://schemas.microsoft.com/office/drawing/2014/main" id="{CA17A711-5FC6-1675-3783-665B61F249E3}"/>
               </a:ext>
             </a:extLst>
           </p:cNvPr>
-          <p:cNvSpPr>
-            <a:spLocks noGrp="1"/>
-          </p:cNvSpPr>
-          <p:nvPr>
-            <p:ph idx="1"/>
-          </p:nvPr>
-        </p:nvSpPr>
-        <p:spPr/>
-        <p:txBody>
-          <a:bodyPr/>
+          <p:cNvSpPr txBox="1"/>
+          <p:nvPr/>
+        </p:nvSpPr>
+        <p:spPr>
+          <a:xfrm>
+            <a:off x="5276850" y="5408884"/>
+            <a:ext cx="5905500" cy="954107"/>
+          </a:xfrm>
+          <a:prstGeom prst="rect">
+            <a:avLst/>
+          </a:prstGeom>
+          <a:noFill/>
+        </p:spPr>
+        <p:txBody>
+          <a:bodyPr wrap="square" rtlCol="0">
+            <a:spAutoFit/>
+          </a:bodyPr>
           <a:lstStyle/>
           <a:p>
-            <a:endParaRPr kumimoji="1" lang="ja-JP" altLang="en-US"/>
-          </a:p>
-        </p:txBody>
-      </p:sp>
+            <a:r>
+              <a:rPr kumimoji="1" lang="ja-JP" altLang="en-US" sz="2800" dirty="0"/>
+              <a:t>自分が撮った写真などを貼り付けて、各ページごとに文字で説明する。</a:t>
+            </a:r>
+            <a:endParaRPr kumimoji="1" lang="en-US" altLang="ja-JP" sz="2800" dirty="0"/>
+          </a:p>
+        </p:txBody>
+      </p:sp>
+      <p:sp>
+        <p:nvSpPr>
+          <p:cNvPr id="8" name="テキスト ボックス 7">
+            <a:extLst>
+              <a:ext uri="{FF2B5EF4-FFF2-40B4-BE49-F238E27FC236}">
+                <a16:creationId xmlns:a16="http://schemas.microsoft.com/office/drawing/2014/main" id="{3D741F1A-FC0F-2423-078B-3F8E880F387B}"/>
+              </a:ext>
+            </a:extLst>
+          </p:cNvPr>
+          <p:cNvSpPr txBox="1"/>
+          <p:nvPr/>
+        </p:nvSpPr>
+        <p:spPr>
+          <a:xfrm>
+            <a:off x="5276850" y="240884"/>
+            <a:ext cx="5596128" cy="1631216"/>
+          </a:xfrm>
+          <a:prstGeom prst="rect">
+            <a:avLst/>
+          </a:prstGeom>
+          <a:noFill/>
+        </p:spPr>
+        <p:txBody>
+          <a:bodyPr wrap="square" rtlCol="0">
+            <a:spAutoFit/>
+          </a:bodyPr>
+          <a:lstStyle/>
+          <a:p>
+            <a:r>
+              <a:rPr kumimoji="1" lang="ja-JP" altLang="en-US" sz="4400" b="1" dirty="0">
+                <a:solidFill>
+                  <a:schemeClr val="accent1"/>
+                </a:solidFill>
+                <a:effectLst>
+                  <a:outerShdw blurRad="38100" dist="38100" dir="2700000" algn="tl">
+                    <a:srgbClr val="000000">
+                      <a:alpha val="43137"/>
+                    </a:srgbClr>
+                  </a:outerShdw>
+                </a:effectLst>
+              </a:rPr>
+              <a:t>工程</a:t>
+            </a:r>
+            <a:endParaRPr kumimoji="1" lang="en-US" altLang="ja-JP" sz="4400" b="1" dirty="0">
+              <a:solidFill>
+                <a:schemeClr val="accent1"/>
+              </a:solidFill>
+              <a:effectLst>
+                <a:outerShdw blurRad="38100" dist="38100" dir="2700000" algn="tl">
+                  <a:srgbClr val="000000">
+                    <a:alpha val="43137"/>
+                  </a:srgbClr>
+                </a:outerShdw>
+              </a:effectLst>
+            </a:endParaRPr>
+          </a:p>
+          <a:p>
+            <a:endParaRPr kumimoji="1" lang="en-US" altLang="ja-JP" sz="2800" dirty="0"/>
+          </a:p>
+          <a:p>
+            <a:r>
+              <a:rPr kumimoji="1" lang="ja-JP" altLang="en-US" sz="2800" dirty="0"/>
+              <a:t>合計</a:t>
+            </a:r>
+            <a:r>
+              <a:rPr kumimoji="1" lang="en-US" altLang="ja-JP" sz="2800" dirty="0"/>
+              <a:t>5</a:t>
+            </a:r>
+            <a:r>
+              <a:rPr kumimoji="1" lang="ja-JP" altLang="en-US" sz="2800" dirty="0"/>
+              <a:t>ページ作る。</a:t>
+            </a:r>
+          </a:p>
+        </p:txBody>
+      </p:sp>
+      <p:sp>
+        <p:nvSpPr>
+          <p:cNvPr id="2" name="テキスト ボックス 1">
+            <a:extLst>
+              <a:ext uri="{FF2B5EF4-FFF2-40B4-BE49-F238E27FC236}">
+                <a16:creationId xmlns:a16="http://schemas.microsoft.com/office/drawing/2014/main" id="{EC47DAB7-DABD-B163-7A24-601E5A53480C}"/>
+              </a:ext>
+            </a:extLst>
+          </p:cNvPr>
+          <p:cNvSpPr txBox="1"/>
+          <p:nvPr/>
+        </p:nvSpPr>
+        <p:spPr>
+          <a:xfrm>
+            <a:off x="5276850" y="2148339"/>
+            <a:ext cx="5905500" cy="1815882"/>
+          </a:xfrm>
+          <a:prstGeom prst="rect">
+            <a:avLst/>
+          </a:prstGeom>
+          <a:noFill/>
+        </p:spPr>
+        <p:txBody>
+          <a:bodyPr wrap="square" rtlCol="0">
+            <a:spAutoFit/>
+          </a:bodyPr>
+          <a:lstStyle/>
+          <a:p>
+            <a:r>
+              <a:rPr kumimoji="1" lang="en-US" altLang="ja-JP" sz="2800" dirty="0"/>
+              <a:t>HTML</a:t>
+            </a:r>
+            <a:r>
+              <a:rPr kumimoji="1" lang="ja-JP" altLang="en-US" sz="2800" dirty="0"/>
+              <a:t>で</a:t>
+            </a:r>
+            <a:r>
+              <a:rPr lang="ja-JP" altLang="en-US" sz="2800" dirty="0"/>
+              <a:t>ページの文章構造や情報を配置</a:t>
+            </a:r>
+            <a:r>
+              <a:rPr lang="en-US" altLang="ja-JP" sz="2800" dirty="0"/>
+              <a:t>(</a:t>
+            </a:r>
+            <a:r>
+              <a:rPr lang="ja-JP" altLang="en-US" sz="2800" dirty="0"/>
+              <a:t>骨組み</a:t>
+            </a:r>
+            <a:r>
+              <a:rPr lang="en-US" altLang="ja-JP" sz="2800" dirty="0"/>
+              <a:t>)</a:t>
+            </a:r>
+            <a:r>
+              <a:rPr lang="ja-JP" altLang="en-US" sz="2800" dirty="0"/>
+              <a:t>を作り、</a:t>
+            </a:r>
+            <a:endParaRPr lang="en-US" altLang="ja-JP" sz="2800" dirty="0"/>
+          </a:p>
+          <a:p>
+            <a:r>
+              <a:rPr kumimoji="1" lang="en-US" altLang="ja-JP" sz="2800" dirty="0"/>
+              <a:t>CSS</a:t>
+            </a:r>
+            <a:r>
+              <a:rPr kumimoji="1" lang="ja-JP" altLang="en-US" sz="2800" dirty="0"/>
+              <a:t>で</a:t>
+            </a:r>
+            <a:r>
+              <a:rPr lang="ja-JP" altLang="en-US" sz="2800" dirty="0"/>
+              <a:t>色、フォント、背景、レイアウトなどを装飾する。</a:t>
+            </a:r>
+            <a:endParaRPr kumimoji="1" lang="ja-JP" altLang="en-US" sz="2800" dirty="0"/>
+          </a:p>
+        </p:txBody>
+      </p:sp>
+      <p:pic>
+        <p:nvPicPr>
+          <p:cNvPr id="4" name="図 3" descr="ダイアグラム, 設計図">
+            <a:extLst>
+              <a:ext uri="{FF2B5EF4-FFF2-40B4-BE49-F238E27FC236}">
+                <a16:creationId xmlns:a16="http://schemas.microsoft.com/office/drawing/2014/main" id="{615EA78C-E9F4-6498-EB3F-DA1FB3146E83}"/>
+              </a:ext>
+            </a:extLst>
+          </p:cNvPr>
+          <p:cNvPicPr>
+            <a:picLocks noChangeAspect="1"/>
+          </p:cNvPicPr>
+          <p:nvPr/>
+        </p:nvPicPr>
+        <p:blipFill>
+          <a:blip r:embed="rId2">
+            <a:extLst>
+              <a:ext uri="{28A0092B-C50C-407E-A947-70E740481C1C}">
+                <a14:useLocalDpi xmlns:a14="http://schemas.microsoft.com/office/drawing/2010/main" val="0"/>
+              </a:ext>
+            </a:extLst>
+          </a:blip>
+          <a:stretch>
+            <a:fillRect/>
+          </a:stretch>
+        </p:blipFill>
+        <p:spPr>
+          <a:xfrm>
+            <a:off x="211393" y="240884"/>
+            <a:ext cx="4250817" cy="6376226"/>
+          </a:xfrm>
+          <a:prstGeom prst="rect">
+            <a:avLst/>
+          </a:prstGeom>
+        </p:spPr>
+      </p:pic>
+    </p:spTree>
+    <p:extLst>
+      <p:ext uri="{BB962C8B-B14F-4D97-AF65-F5344CB8AC3E}">
+        <p14:creationId xmlns:p14="http://schemas.microsoft.com/office/powerpoint/2010/main" val="2945730443"/>
+      </p:ext>
+    </p:extLst>
+  </p:cSld>
+  <p:clrMapOvr>
+    <a:masterClrMapping/>
+  </p:clrMapOvr>
+</p:sld>
+</file>
+
+<file path=ppt/slides/slide7.xml><?xml version="1.0" encoding="utf-8"?>
+<p:sld xmlns:a="http://schemas.openxmlformats.org/drawingml/2006/main" xmlns:r="http://schemas.openxmlformats.org/officeDocument/2006/relationships" xmlns:p="http://schemas.openxmlformats.org/presentationml/2006/main">
+  <p:cSld>
+    <p:spTree>
+      <p:nvGrpSpPr>
+        <p:cNvPr id="1" name=""/>
+        <p:cNvGrpSpPr/>
+        <p:nvPr/>
+      </p:nvGrpSpPr>
+      <p:grpSpPr>
+        <a:xfrm>
+          <a:off x="0" y="0"/>
+          <a:ext cx="0" cy="0"/>
+          <a:chOff x="0" y="0"/>
+          <a:chExt cx="0" cy="0"/>
+        </a:xfrm>
+      </p:grpSpPr>
+      <p:sp>
+        <p:nvSpPr>
+          <p:cNvPr id="9" name="テキスト ボックス 8">
+            <a:extLst>
+              <a:ext uri="{FF2B5EF4-FFF2-40B4-BE49-F238E27FC236}">
+                <a16:creationId xmlns:a16="http://schemas.microsoft.com/office/drawing/2014/main" id="{6672ABA5-8053-45BA-D8D0-5C6689F7DE93}"/>
+              </a:ext>
+            </a:extLst>
+          </p:cNvPr>
+          <p:cNvSpPr txBox="1"/>
+          <p:nvPr/>
+        </p:nvSpPr>
+        <p:spPr>
+          <a:xfrm>
+            <a:off x="3530597" y="1206784"/>
+            <a:ext cx="5130801" cy="1477328"/>
+          </a:xfrm>
+          <a:prstGeom prst="rect">
+            <a:avLst/>
+          </a:prstGeom>
+          <a:noFill/>
+        </p:spPr>
+        <p:txBody>
+          <a:bodyPr wrap="square">
+            <a:spAutoFit/>
+          </a:bodyPr>
+          <a:lstStyle/>
+          <a:p>
+            <a:pPr rtl="0">
+              <a:buNone/>
+            </a:pPr>
+            <a:r>
+              <a:rPr lang="ja-JP" altLang="en-US" sz="5400" b="1" i="0" u="none" strike="noStrike" dirty="0">
+                <a:solidFill>
+                  <a:schemeClr val="accent1"/>
+                </a:solidFill>
+                <a:effectLst>
+                  <a:outerShdw blurRad="38100" dist="38100" dir="2700000" algn="tl">
+                    <a:srgbClr val="000000">
+                      <a:alpha val="43137"/>
+                    </a:srgbClr>
+                  </a:outerShdw>
+                </a:effectLst>
+                <a:latin typeface="Corbel" panose="020B0503020204020204" pitchFamily="34" charset="0"/>
+              </a:rPr>
+              <a:t>制作・研究方法</a:t>
+            </a:r>
+            <a:endParaRPr lang="ja-JP" altLang="en-US" sz="5400" b="1" dirty="0">
+              <a:solidFill>
+                <a:schemeClr val="accent1"/>
+              </a:solidFill>
+              <a:effectLst>
+                <a:outerShdw blurRad="38100" dist="38100" dir="2700000" algn="tl">
+                  <a:srgbClr val="000000">
+                    <a:alpha val="43137"/>
+                  </a:srgbClr>
+                </a:outerShdw>
+              </a:effectLst>
+            </a:endParaRPr>
+          </a:p>
+          <a:p>
+            <a:pPr>
+              <a:buNone/>
+            </a:pPr>
+            <a:br>
+              <a:rPr lang="ja-JP" altLang="en-US" dirty="0"/>
+            </a:br>
+            <a:endParaRPr lang="ja-JP" altLang="en-US" dirty="0"/>
+          </a:p>
+        </p:txBody>
+      </p:sp>
+      <p:sp>
+        <p:nvSpPr>
+          <p:cNvPr id="12" name="正方形/長方形 11">
+            <a:extLst>
+              <a:ext uri="{FF2B5EF4-FFF2-40B4-BE49-F238E27FC236}">
+                <a16:creationId xmlns:a16="http://schemas.microsoft.com/office/drawing/2014/main" id="{CEFE09B8-9FEA-FFDD-A3F1-AB48BDC4B6F6}"/>
+              </a:ext>
+            </a:extLst>
+          </p:cNvPr>
+          <p:cNvSpPr/>
+          <p:nvPr/>
+        </p:nvSpPr>
+        <p:spPr>
+          <a:xfrm>
+            <a:off x="3180565" y="2780008"/>
+            <a:ext cx="5830867" cy="2322576"/>
+          </a:xfrm>
+          <a:prstGeom prst="rect">
+            <a:avLst/>
+          </a:prstGeom>
+        </p:spPr>
+        <p:style>
+          <a:lnRef idx="2">
+            <a:schemeClr val="accent1">
+              <a:shade val="15000"/>
+            </a:schemeClr>
+          </a:lnRef>
+          <a:fillRef idx="1">
+            <a:schemeClr val="accent1"/>
+          </a:fillRef>
+          <a:effectRef idx="0">
+            <a:schemeClr val="accent1"/>
+          </a:effectRef>
+          <a:fontRef idx="minor">
+            <a:schemeClr val="lt1"/>
+          </a:fontRef>
+        </p:style>
+        <p:txBody>
+          <a:bodyPr rtlCol="0" anchor="ctr"/>
+          <a:lstStyle/>
+          <a:p>
+            <a:pPr algn="ctr"/>
+            <a:endParaRPr kumimoji="1" lang="ja-JP" altLang="en-US" dirty="0"/>
+          </a:p>
+        </p:txBody>
+      </p:sp>
+      <p:sp>
+        <p:nvSpPr>
+          <p:cNvPr id="11" name="テキスト ボックス 10">
+            <a:extLst>
+              <a:ext uri="{FF2B5EF4-FFF2-40B4-BE49-F238E27FC236}">
+                <a16:creationId xmlns:a16="http://schemas.microsoft.com/office/drawing/2014/main" id="{BF8D4984-3F00-0B4C-B94F-3B52E2C929AF}"/>
+              </a:ext>
+            </a:extLst>
+          </p:cNvPr>
+          <p:cNvSpPr txBox="1"/>
+          <p:nvPr/>
+        </p:nvSpPr>
+        <p:spPr>
+          <a:xfrm>
+            <a:off x="3224741" y="2971800"/>
+            <a:ext cx="5742518" cy="1938992"/>
+          </a:xfrm>
+          <a:prstGeom prst="rect">
+            <a:avLst/>
+          </a:prstGeom>
+          <a:noFill/>
+        </p:spPr>
+        <p:txBody>
+          <a:bodyPr wrap="square" rtlCol="0">
+            <a:spAutoFit/>
+          </a:bodyPr>
+          <a:lstStyle/>
+          <a:p>
+            <a:r>
+              <a:rPr kumimoji="1" lang="ja-JP" altLang="en-US" sz="4000" dirty="0"/>
+              <a:t>  撮影機材　    スマホ</a:t>
+            </a:r>
+            <a:endParaRPr kumimoji="1" lang="en-US" altLang="ja-JP" sz="4000" dirty="0"/>
+          </a:p>
+          <a:p>
+            <a:endParaRPr kumimoji="1" lang="en-US" altLang="ja-JP" sz="4000" dirty="0"/>
+          </a:p>
+          <a:p>
+            <a:r>
+              <a:rPr kumimoji="1" lang="ja-JP" altLang="en-US" sz="4000" dirty="0"/>
+              <a:t>使用ソフト　</a:t>
+            </a:r>
+            <a:r>
+              <a:rPr kumimoji="1" lang="en-US" altLang="ja-JP" sz="4000" dirty="0"/>
+              <a:t>HTML,CSS</a:t>
+            </a:r>
+          </a:p>
+        </p:txBody>
+      </p:sp>
+      <p:cxnSp>
+        <p:nvCxnSpPr>
+          <p:cNvPr id="14" name="直線コネクタ 13">
+            <a:extLst>
+              <a:ext uri="{FF2B5EF4-FFF2-40B4-BE49-F238E27FC236}">
+                <a16:creationId xmlns:a16="http://schemas.microsoft.com/office/drawing/2014/main" id="{479BC29B-647F-7821-FD23-79F41EB84AF0}"/>
+              </a:ext>
+            </a:extLst>
+          </p:cNvPr>
+          <p:cNvCxnSpPr>
+            <a:stCxn id="12" idx="0"/>
+            <a:endCxn id="12" idx="2"/>
+          </p:cNvCxnSpPr>
+          <p:nvPr/>
+        </p:nvCxnSpPr>
+        <p:spPr>
+          <a:xfrm>
+            <a:off x="6095999" y="2780008"/>
+            <a:ext cx="0" cy="2322576"/>
+          </a:xfrm>
+          <a:prstGeom prst="line">
+            <a:avLst/>
+          </a:prstGeom>
+        </p:spPr>
+        <p:style>
+          <a:lnRef idx="1">
+            <a:schemeClr val="dk1"/>
+          </a:lnRef>
+          <a:fillRef idx="0">
+            <a:schemeClr val="dk1"/>
+          </a:fillRef>
+          <a:effectRef idx="0">
+            <a:schemeClr val="dk1"/>
+          </a:effectRef>
+          <a:fontRef idx="minor">
+            <a:schemeClr val="tx1"/>
+          </a:fontRef>
+        </p:style>
+      </p:cxnSp>
+      <p:cxnSp>
+        <p:nvCxnSpPr>
+          <p:cNvPr id="16" name="直線コネクタ 15">
+            <a:extLst>
+              <a:ext uri="{FF2B5EF4-FFF2-40B4-BE49-F238E27FC236}">
+                <a16:creationId xmlns:a16="http://schemas.microsoft.com/office/drawing/2014/main" id="{ED7A907E-E798-3024-0B07-0AE52382D5C8}"/>
+              </a:ext>
+            </a:extLst>
+          </p:cNvPr>
+          <p:cNvCxnSpPr>
+            <a:stCxn id="12" idx="1"/>
+          </p:cNvCxnSpPr>
+          <p:nvPr/>
+        </p:nvCxnSpPr>
+        <p:spPr>
+          <a:xfrm>
+            <a:off x="3180565" y="3941296"/>
+            <a:ext cx="5830867" cy="0"/>
+          </a:xfrm>
+          <a:prstGeom prst="line">
+            <a:avLst/>
+          </a:prstGeom>
+        </p:spPr>
+        <p:style>
+          <a:lnRef idx="1">
+            <a:schemeClr val="dk1"/>
+          </a:lnRef>
+          <a:fillRef idx="0">
+            <a:schemeClr val="dk1"/>
+          </a:fillRef>
+          <a:effectRef idx="0">
+            <a:schemeClr val="dk1"/>
+          </a:effectRef>
+          <a:fontRef idx="minor">
+            <a:schemeClr val="tx1"/>
+          </a:fontRef>
+        </p:style>
+      </p:cxnSp>
     </p:spTree>
     <p:extLst>
       <p:ext uri="{BB962C8B-B14F-4D97-AF65-F5344CB8AC3E}">
